--- a/week02/Lecture02.pptx
+++ b/week02/Lecture02.pptx
@@ -43,7 +43,8 @@
     <p:sldId id="287" r:id="rId37"/>
     <p:sldId id="418" r:id="rId38"/>
     <p:sldId id="419" r:id="rId39"/>
-    <p:sldId id="284" r:id="rId40"/>
+    <p:sldId id="426" r:id="rId40"/>
+    <p:sldId id="284" r:id="rId41"/>
   </p:sldIdLst>
   <p:sldSz cx="12192000" cy="6858000"/>
   <p:notesSz cx="6858000" cy="9144000"/>
@@ -3645,7 +3646,7 @@
           <a:p>
             <a:fld id="{FC19A4FA-3D9A-4114-B0D5-759CBD56F1AB}" type="datetimeFigureOut">
               <a:rPr lang="zh-CN" altLang="en-US" smtClean="0"/>
-              <a:t>2025/2/23</a:t>
+              <a:t>2026/3/9</a:t>
             </a:fld>
             <a:endParaRPr lang="zh-CN" altLang="en-US"/>
           </a:p>
@@ -3848,7 +3849,7 @@
           <a:p>
             <a:fld id="{FC19A4FA-3D9A-4114-B0D5-759CBD56F1AB}" type="datetimeFigureOut">
               <a:rPr lang="zh-CN" altLang="en-US" smtClean="0"/>
-              <a:t>2025/2/23</a:t>
+              <a:t>2026/3/9</a:t>
             </a:fld>
             <a:endParaRPr lang="zh-CN" altLang="en-US"/>
           </a:p>
@@ -4026,7 +4027,7 @@
           <a:p>
             <a:fld id="{FC19A4FA-3D9A-4114-B0D5-759CBD56F1AB}" type="datetimeFigureOut">
               <a:rPr lang="zh-CN" altLang="en-US" smtClean="0"/>
-              <a:t>2025/2/23</a:t>
+              <a:t>2026/3/9</a:t>
             </a:fld>
             <a:endParaRPr lang="zh-CN" altLang="en-US"/>
           </a:p>
@@ -4250,7 +4251,7 @@
           <a:p>
             <a:fld id="{FC19A4FA-3D9A-4114-B0D5-759CBD56F1AB}" type="datetimeFigureOut">
               <a:rPr lang="zh-CN" altLang="en-US" smtClean="0"/>
-              <a:t>2025/2/23</a:t>
+              <a:t>2026/3/9</a:t>
             </a:fld>
             <a:endParaRPr lang="zh-CN" altLang="en-US"/>
           </a:p>
@@ -4484,7 +4485,7 @@
           <a:p>
             <a:fld id="{FC19A4FA-3D9A-4114-B0D5-759CBD56F1AB}" type="datetimeFigureOut">
               <a:rPr lang="zh-CN" altLang="en-US" smtClean="0"/>
-              <a:t>2025/2/23</a:t>
+              <a:t>2026/3/9</a:t>
             </a:fld>
             <a:endParaRPr lang="zh-CN" altLang="en-US"/>
           </a:p>
@@ -4883,7 +4884,7 @@
           <a:p>
             <a:fld id="{FC19A4FA-3D9A-4114-B0D5-759CBD56F1AB}" type="datetimeFigureOut">
               <a:rPr lang="zh-CN" altLang="en-US" smtClean="0"/>
-              <a:t>2025/2/23</a:t>
+              <a:t>2026/3/9</a:t>
             </a:fld>
             <a:endParaRPr lang="zh-CN" altLang="en-US"/>
           </a:p>
@@ -5163,7 +5164,7 @@
           <a:p>
             <a:fld id="{FC19A4FA-3D9A-4114-B0D5-759CBD56F1AB}" type="datetimeFigureOut">
               <a:rPr lang="zh-CN" altLang="en-US" smtClean="0"/>
-              <a:t>2025/2/23</a:t>
+              <a:t>2026/3/9</a:t>
             </a:fld>
             <a:endParaRPr lang="zh-CN" altLang="en-US"/>
           </a:p>
@@ -5315,7 +5316,7 @@
           <a:p>
             <a:fld id="{FC19A4FA-3D9A-4114-B0D5-759CBD56F1AB}" type="datetimeFigureOut">
               <a:rPr lang="zh-CN" altLang="en-US" smtClean="0"/>
-              <a:t>2025/2/23</a:t>
+              <a:t>2026/3/9</a:t>
             </a:fld>
             <a:endParaRPr lang="zh-CN" altLang="en-US"/>
           </a:p>
@@ -5445,7 +5446,7 @@
           <a:p>
             <a:fld id="{FC19A4FA-3D9A-4114-B0D5-759CBD56F1AB}" type="datetimeFigureOut">
               <a:rPr lang="zh-CN" altLang="en-US" smtClean="0"/>
-              <a:t>2025/2/23</a:t>
+              <a:t>2026/3/9</a:t>
             </a:fld>
             <a:endParaRPr lang="zh-CN" altLang="en-US"/>
           </a:p>
@@ -5755,7 +5756,7 @@
           <a:p>
             <a:fld id="{FC19A4FA-3D9A-4114-B0D5-759CBD56F1AB}" type="datetimeFigureOut">
               <a:rPr lang="zh-CN" altLang="en-US" smtClean="0"/>
-              <a:t>2025/2/23</a:t>
+              <a:t>2026/3/9</a:t>
             </a:fld>
             <a:endParaRPr lang="zh-CN" altLang="en-US"/>
           </a:p>
@@ -6042,7 +6043,7 @@
           <a:p>
             <a:fld id="{FC19A4FA-3D9A-4114-B0D5-759CBD56F1AB}" type="datetimeFigureOut">
               <a:rPr lang="zh-CN" altLang="en-US" smtClean="0"/>
-              <a:t>2025/2/23</a:t>
+              <a:t>2026/3/9</a:t>
             </a:fld>
             <a:endParaRPr lang="zh-CN" altLang="en-US"/>
           </a:p>
@@ -6335,7 +6336,7 @@
           <a:p>
             <a:fld id="{FC19A4FA-3D9A-4114-B0D5-759CBD56F1AB}" type="datetimeFigureOut">
               <a:rPr lang="zh-CN" altLang="en-US" smtClean="0"/>
-              <a:t>2025/2/23</a:t>
+              <a:t>2026/3/9</a:t>
             </a:fld>
             <a:endParaRPr lang="zh-CN" altLang="en-US"/>
           </a:p>
@@ -23261,7 +23262,7 @@
           <p:cNvPr id="2" name="标题 1">
             <a:extLst>
               <a:ext uri="{FF2B5EF4-FFF2-40B4-BE49-F238E27FC236}">
-                <a16:creationId xmlns:a16="http://schemas.microsoft.com/office/drawing/2014/main" id="{3D35D745-8654-0E4A-8CA7-FFBDA6ABE28D}"/>
+                <a16:creationId xmlns:a16="http://schemas.microsoft.com/office/drawing/2014/main" id="{729CE55F-3988-0343-3314-497EC35E963A}"/>
               </a:ext>
             </a:extLst>
           </p:cNvPr>
@@ -23278,8 +23279,8 @@
           <a:lstStyle/>
           <a:p>
             <a:r>
-              <a:rPr kumimoji="1" lang="en" altLang="zh-CN" dirty="0"/>
-              <a:t>C/C++ Supposes</a:t>
+              <a:rPr kumimoji="1" lang="en-US" altLang="zh-CN" dirty="0"/>
+              <a:t>Questions</a:t>
             </a:r>
             <a:endParaRPr kumimoji="1" lang="zh-CN" altLang="en-US" dirty="0"/>
           </a:p>
@@ -23290,7 +23291,7 @@
           <p:cNvPr id="3" name="内容占位符 2">
             <a:extLst>
               <a:ext uri="{FF2B5EF4-FFF2-40B4-BE49-F238E27FC236}">
-                <a16:creationId xmlns:a16="http://schemas.microsoft.com/office/drawing/2014/main" id="{5130D763-3669-8044-8984-05ECF214A649}"/>
+                <a16:creationId xmlns:a16="http://schemas.microsoft.com/office/drawing/2014/main" id="{7F8C31AE-A32E-DCE8-3FB2-C83113E37BD9}"/>
               </a:ext>
             </a:extLst>
           </p:cNvPr>
@@ -23306,15 +23307,78 @@
           <a:bodyPr/>
           <a:lstStyle/>
           <a:p>
+            <a:pPr marL="0" indent="0">
+              <a:buNone/>
+            </a:pPr>
             <a:r>
               <a:rPr kumimoji="1" lang="en-US" altLang="zh-CN" dirty="0"/>
-              <a:t>You (the programmer) are smart enough!</a:t>
-            </a:r>
-          </a:p>
-          <a:p>
+              <a:t>In OpenCV there is a class </a:t>
+            </a:r>
+            <a:r>
+              <a:rPr kumimoji="1" lang="en-US" altLang="zh-CN" dirty="0">
+                <a:latin typeface="Courier New" panose="02070309020205020404" pitchFamily="49" charset="0"/>
+                <a:cs typeface="Courier New" panose="02070309020205020404" pitchFamily="49" charset="0"/>
+              </a:rPr>
+              <a:t>cv::Mat </a:t>
+            </a:r>
             <a:r>
               <a:rPr kumimoji="1" lang="en-US" altLang="zh-CN" dirty="0"/>
-              <a:t>You know what exactly the source code means!</a:t>
+              <a:t>for matrices. Find the answers to the questions from the source code of OpenCV at </a:t>
+            </a:r>
+            <a:r>
+              <a:rPr kumimoji="1" lang="en-US" altLang="zh-CN" dirty="0">
+                <a:hlinkClick r:id="rId2"/>
+              </a:rPr>
+              <a:t>https://github.com/opencv/opencv</a:t>
+            </a:r>
+            <a:r>
+              <a:rPr kumimoji="1" lang="en-US" altLang="zh-CN" dirty="0"/>
+              <a:t> </a:t>
+            </a:r>
+          </a:p>
+          <a:p>
+            <a:r>
+              <a:rPr kumimoji="1" lang="en-US" altLang="zh-CN" dirty="0"/>
+              <a:t>How many data types does OpenCV's </a:t>
+            </a:r>
+            <a:r>
+              <a:rPr kumimoji="1" lang="en-US" altLang="zh-CN" dirty="0">
+                <a:latin typeface="Courier New" panose="02070309020205020404" pitchFamily="49" charset="0"/>
+                <a:cs typeface="Courier New" panose="02070309020205020404" pitchFamily="49" charset="0"/>
+              </a:rPr>
+              <a:t>cv::Mat </a:t>
+            </a:r>
+            <a:r>
+              <a:rPr kumimoji="1" lang="en-US" altLang="zh-CN" dirty="0"/>
+              <a:t>class support for matrix elements?</a:t>
+            </a:r>
+          </a:p>
+          <a:p>
+            <a:r>
+              <a:rPr kumimoji="1" lang="en-US" altLang="zh-CN" dirty="0"/>
+              <a:t>How does </a:t>
+            </a:r>
+            <a:r>
+              <a:rPr kumimoji="1" lang="en-US" altLang="zh-CN" dirty="0">
+                <a:latin typeface="Courier New" panose="02070309020205020404" pitchFamily="49" charset="0"/>
+                <a:cs typeface="Courier New" panose="02070309020205020404" pitchFamily="49" charset="0"/>
+              </a:rPr>
+              <a:t>cv::Mat </a:t>
+            </a:r>
+            <a:r>
+              <a:rPr kumimoji="1" lang="en-US" altLang="zh-CN" dirty="0"/>
+              <a:t>handle data types when the size of </a:t>
+            </a:r>
+            <a:r>
+              <a:rPr kumimoji="1" lang="en-US" altLang="zh-CN" dirty="0">
+                <a:latin typeface="Courier New" panose="02070309020205020404" pitchFamily="49" charset="0"/>
+                <a:cs typeface="Courier New" panose="02070309020205020404" pitchFamily="49" charset="0"/>
+              </a:rPr>
+              <a:t>int</a:t>
+            </a:r>
+            <a:r>
+              <a:rPr kumimoji="1" lang="en-US" altLang="zh-CN" dirty="0"/>
+              <a:t> may not be 32 bits on different platforms?</a:t>
             </a:r>
             <a:endParaRPr kumimoji="1" lang="zh-CN" altLang="en-US" dirty="0"/>
           </a:p>
@@ -23323,7 +23387,7 @@
     </p:spTree>
     <p:extLst>
       <p:ext uri="{BB962C8B-B14F-4D97-AF65-F5344CB8AC3E}">
-        <p14:creationId xmlns:p14="http://schemas.microsoft.com/office/powerpoint/2010/main" val="1237377883"/>
+        <p14:creationId xmlns:p14="http://schemas.microsoft.com/office/powerpoint/2010/main" val="4281358624"/>
       </p:ext>
     </p:extLst>
   </p:cSld>
@@ -24420,6 +24484,100 @@
 </p:sld>
 </file>
 
+<file path=ppt/slides/slide40.xml><?xml version="1.0" encoding="utf-8"?>
+<p:sld xmlns:a="http://schemas.openxmlformats.org/drawingml/2006/main" xmlns:r="http://schemas.openxmlformats.org/officeDocument/2006/relationships" xmlns:p="http://schemas.openxmlformats.org/presentationml/2006/main">
+  <p:cSld>
+    <p:spTree>
+      <p:nvGrpSpPr>
+        <p:cNvPr id="1" name=""/>
+        <p:cNvGrpSpPr/>
+        <p:nvPr/>
+      </p:nvGrpSpPr>
+      <p:grpSpPr>
+        <a:xfrm>
+          <a:off x="0" y="0"/>
+          <a:ext cx="0" cy="0"/>
+          <a:chOff x="0" y="0"/>
+          <a:chExt cx="0" cy="0"/>
+        </a:xfrm>
+      </p:grpSpPr>
+      <p:sp>
+        <p:nvSpPr>
+          <p:cNvPr id="2" name="标题 1">
+            <a:extLst>
+              <a:ext uri="{FF2B5EF4-FFF2-40B4-BE49-F238E27FC236}">
+                <a16:creationId xmlns:a16="http://schemas.microsoft.com/office/drawing/2014/main" id="{3D35D745-8654-0E4A-8CA7-FFBDA6ABE28D}"/>
+              </a:ext>
+            </a:extLst>
+          </p:cNvPr>
+          <p:cNvSpPr>
+            <a:spLocks noGrp="1"/>
+          </p:cNvSpPr>
+          <p:nvPr>
+            <p:ph type="title"/>
+          </p:nvPr>
+        </p:nvSpPr>
+        <p:spPr/>
+        <p:txBody>
+          <a:bodyPr/>
+          <a:lstStyle/>
+          <a:p>
+            <a:r>
+              <a:rPr kumimoji="1" lang="en" altLang="zh-CN" dirty="0"/>
+              <a:t>C/C++ Supposes</a:t>
+            </a:r>
+            <a:endParaRPr kumimoji="1" lang="zh-CN" altLang="en-US" dirty="0"/>
+          </a:p>
+        </p:txBody>
+      </p:sp>
+      <p:sp>
+        <p:nvSpPr>
+          <p:cNvPr id="3" name="内容占位符 2">
+            <a:extLst>
+              <a:ext uri="{FF2B5EF4-FFF2-40B4-BE49-F238E27FC236}">
+                <a16:creationId xmlns:a16="http://schemas.microsoft.com/office/drawing/2014/main" id="{5130D763-3669-8044-8984-05ECF214A649}"/>
+              </a:ext>
+            </a:extLst>
+          </p:cNvPr>
+          <p:cNvSpPr>
+            <a:spLocks noGrp="1"/>
+          </p:cNvSpPr>
+          <p:nvPr>
+            <p:ph idx="1"/>
+          </p:nvPr>
+        </p:nvSpPr>
+        <p:spPr/>
+        <p:txBody>
+          <a:bodyPr/>
+          <a:lstStyle/>
+          <a:p>
+            <a:r>
+              <a:rPr kumimoji="1" lang="en-US" altLang="zh-CN" dirty="0"/>
+              <a:t>You (the programmer) are smart enough!</a:t>
+            </a:r>
+          </a:p>
+          <a:p>
+            <a:r>
+              <a:rPr kumimoji="1" lang="en-US" altLang="zh-CN" dirty="0"/>
+              <a:t>You know what exactly the source code means!</a:t>
+            </a:r>
+            <a:endParaRPr kumimoji="1" lang="zh-CN" altLang="en-US" dirty="0"/>
+          </a:p>
+        </p:txBody>
+      </p:sp>
+    </p:spTree>
+    <p:extLst>
+      <p:ext uri="{BB962C8B-B14F-4D97-AF65-F5344CB8AC3E}">
+        <p14:creationId xmlns:p14="http://schemas.microsoft.com/office/powerpoint/2010/main" val="1237377883"/>
+      </p:ext>
+    </p:extLst>
+  </p:cSld>
+  <p:clrMapOvr>
+    <a:masterClrMapping/>
+  </p:clrMapOvr>
+</p:sld>
+</file>
+
 <file path=ppt/slides/slide5.xml><?xml version="1.0" encoding="utf-8"?>
 <p:sld xmlns:a="http://schemas.openxmlformats.org/drawingml/2006/main" xmlns:r="http://schemas.openxmlformats.org/officeDocument/2006/relationships" xmlns:p="http://schemas.openxmlformats.org/presentationml/2006/main">
   <p:cSld>
